--- a/classes/parte-1-redes-y-seguridad-de-redes/026-wireshark-captura-y-analisis-de-paquetes/clase-026-presentacion.pptx
+++ b/classes/parte-1-redes-y-seguridad-de-redes/026-wireshark-captura-y-analisis-de-paquetes/clase-026-presentacion.pptx
@@ -17,6 +17,9 @@
     <p:sldId id="265" r:id="rId16"/>
     <p:sldId id="266" r:id="rId17"/>
     <p:sldId id="267" r:id="rId18"/>
+    <p:sldId id="268" r:id="rId19"/>
+    <p:sldId id="269" r:id="rId20"/>
+    <p:sldId id="270" r:id="rId21"/>
   </p:sldIdLst>
   <p:sldSz cx="9144000" cy="6858000" type="screen4x3"/>
   <p:notesSz cx="6858000" cy="9144000"/>
@@ -3198,7 +3201,7 @@
                   <a:srgbClr val="0B3D2E"/>
                 </a:solidFill>
               </a:rPr>
-              <a:t>⚠️ Errores comunes</a:t>
+              <a:t>✍️ Ejercicios</a:t>
             </a:r>
           </a:p>
         </p:txBody>
@@ -3236,67 +3239,82 @@
                   <a:srgbClr val="22282E"/>
                 </a:solidFill>
               </a:rPr>
-              <a:t>•  "No interfaces found" o lista vacía — Faltan permisos de captura; añade el usuario al grupo wireshark o revisa Npcap en Windows</a:t>
-            </a:r>
-          </a:p>
-          <a:p>
-            <a:pPr>
-              <a:spcAft>
-                <a:spcPts val="600"/>
-              </a:spcAft>
-            </a:pPr>
-            <a:r>
-              <a:rPr sz="1500">
-                <a:solidFill>
-                  <a:srgbClr val="22282E"/>
-                </a:solidFill>
-              </a:rPr>
-              <a:t>•  Solo ves tu propio tráfico — Estás en un switch sin SPAN/TAP; captura en el host, usa un TAP o configura mirror port</a:t>
-            </a:r>
-          </a:p>
-          <a:p>
-            <a:pPr>
-              <a:spcAft>
-                <a:spcPts val="600"/>
-              </a:spcAft>
-            </a:pPr>
-            <a:r>
-              <a:rPr sz="1500">
-                <a:solidFill>
-                  <a:srgbClr val="22282E"/>
-                </a:solidFill>
-              </a:rPr>
-              <a:t>•  Todo aparece como "Malformed Packet" — Disector equivocado o offloading del NIC; desactiva TCP checksum offload o usa "Decode As"</a:t>
-            </a:r>
-          </a:p>
-          <a:p>
-            <a:pPr>
-              <a:spcAft>
-                <a:spcPts val="600"/>
-              </a:spcAft>
-            </a:pPr>
-            <a:r>
-              <a:rPr sz="1500">
-                <a:solidFill>
-                  <a:srgbClr val="22282E"/>
-                </a:solidFill>
-              </a:rPr>
-              <a:t>•  Checksums TCP/IP en rojo — Checksum offloading de la tarjeta; desactiva validación en Preferencias del protocolo</a:t>
-            </a:r>
-          </a:p>
-          <a:p>
-            <a:pPr>
-              <a:spcAft>
-                <a:spcPts val="600"/>
-              </a:spcAft>
-            </a:pPr>
-            <a:r>
-              <a:rPr sz="1500">
-                <a:solidFill>
-                  <a:srgbClr val="22282E"/>
-                </a:solidFill>
-              </a:rPr>
-              <a:t>•  Captura enorme e inmanejable — No usaste filtro de captura; aplica BPF o usa un ring buffer con límite de tamaño</a:t>
+              <a:t>•  Captura un ping a un host de tu laboratorio e identifica los paquetes ICMP echo request/reply.</a:t>
+            </a:r>
+          </a:p>
+          <a:p>
+            <a:pPr>
+              <a:spcAft>
+                <a:spcPts val="600"/>
+              </a:spcAft>
+            </a:pPr>
+            <a:r>
+              <a:rPr sz="1500">
+                <a:solidFill>
+                  <a:srgbClr val="22282E"/>
+                </a:solidFill>
+              </a:rPr>
+              <a:t>•  Con una captura HTTP, localiza el User-Agent enviado por el cliente.</a:t>
+            </a:r>
+          </a:p>
+          <a:p>
+            <a:pPr>
+              <a:spcAft>
+                <a:spcPts val="600"/>
+              </a:spcAft>
+            </a:pPr>
+            <a:r>
+              <a:rPr sz="1500">
+                <a:solidFill>
+                  <a:srgbClr val="22282E"/>
+                </a:solidFill>
+              </a:rPr>
+              <a:t>•  Añade columnas para ip.ttl y compara TTL de tu gateway vs. un host remoto; deduce el SO probable.</a:t>
+            </a:r>
+          </a:p>
+          <a:p>
+            <a:pPr>
+              <a:spcAft>
+                <a:spcPts val="600"/>
+              </a:spcAft>
+            </a:pPr>
+            <a:r>
+              <a:rPr sz="1500">
+                <a:solidFill>
+                  <a:srgbClr val="22282E"/>
+                </a:solidFill>
+              </a:rPr>
+              <a:t>•  Crea un perfil nuevo llamado "triage" con tus columnas y colores, y cámbialo con el selector inferior derecho.</a:t>
+            </a:r>
+          </a:p>
+          <a:p>
+            <a:pPr>
+              <a:spcAft>
+                <a:spcPts val="600"/>
+              </a:spcAft>
+            </a:pPr>
+            <a:r>
+              <a:rPr sz="1500">
+                <a:solidFill>
+                  <a:srgbClr val="22282E"/>
+                </a:solidFill>
+              </a:rPr>
+              <a:t>•  Usa Estadísticas → Jerarquía de protocolos para ver la composición de una captura de 5 minutos.</a:t>
+            </a:r>
+          </a:p>
+          <a:p>
+            <a:pPr>
+              <a:spcAft>
+                <a:spcPts val="600"/>
+              </a:spcAft>
+            </a:pPr>
+            <a:r>
+              <a:rPr sz="1500">
+                <a:solidFill>
+                  <a:srgbClr val="22282E"/>
+                </a:solidFill>
+              </a:rPr>
+              <a:t>•  Exporta a texto plano (Archivo → Exportar disecciones de paquetes) solo los paquetes de un flujo.</a:t>
             </a:r>
           </a:p>
         </p:txBody>
@@ -3347,7 +3365,7 @@
                   <a:srgbClr val="0B3D2E"/>
                 </a:solidFill>
               </a:rPr>
-              <a:t>❓ Preguntas frecuentes</a:t>
+              <a:t>📝 Reto verificable</a:t>
             </a:r>
           </a:p>
         </p:txBody>
@@ -3385,97 +3403,22 @@
                   <a:srgbClr val="22282E"/>
                 </a:solidFill>
               </a:rPr>
-              <a:t>•  ❓ ¿Cuál es la diferencia entre filtro de captura y filtro de visualización?</a:t>
-            </a:r>
-          </a:p>
-          <a:p>
-            <a:pPr>
-              <a:spcAft>
-                <a:spcPts val="600"/>
-              </a:spcAft>
-            </a:pPr>
-            <a:r>
-              <a:rPr sz="1500">
-                <a:solidFill>
-                  <a:srgbClr val="22282E"/>
-                </a:solidFill>
-              </a:rPr>
-              <a:t>•  El de captura (BPF) decide qué se guarda y no se puede cambiar después; el de visualización solo oculta/enseña sobre lo ya capturado y usa la sintaxis rica de Wireshark (http.request.method == "GET").</a:t>
-            </a:r>
-          </a:p>
-          <a:p>
-            <a:pPr>
-              <a:spcAft>
-                <a:spcPts val="600"/>
-              </a:spcAft>
-            </a:pPr>
-            <a:r>
-              <a:rPr sz="1500">
-                <a:solidFill>
-                  <a:srgbClr val="22282E"/>
-                </a:solidFill>
-              </a:rPr>
-              <a:t>•  ❓ ¿Necesito ser root para capturar?</a:t>
-            </a:r>
-          </a:p>
-          <a:p>
-            <a:pPr>
-              <a:spcAft>
-                <a:spcPts val="600"/>
-              </a:spcAft>
-            </a:pPr>
-            <a:r>
-              <a:rPr sz="1500">
-                <a:solidFill>
-                  <a:srgbClr val="22282E"/>
-                </a:solidFill>
-              </a:rPr>
-              <a:t>•  No es recomendable. Configura dumpcap con capacidades o usa el grupo de captura para que solo el proceso de captura tenga privilegios elevados.</a:t>
-            </a:r>
-          </a:p>
-          <a:p>
-            <a:pPr>
-              <a:spcAft>
-                <a:spcPts val="600"/>
-              </a:spcAft>
-            </a:pPr>
-            <a:r>
-              <a:rPr sz="1500">
-                <a:solidFill>
-                  <a:srgbClr val="22282E"/>
-                </a:solidFill>
-              </a:rPr>
-              <a:t>•  ❓ ¿pcap o pcapng?</a:t>
-            </a:r>
-          </a:p>
-          <a:p>
-            <a:pPr>
-              <a:spcAft>
-                <a:spcPts val="600"/>
-              </a:spcAft>
-            </a:pPr>
-            <a:r>
-              <a:rPr sz="1500">
-                <a:solidFill>
-                  <a:srgbClr val="22282E"/>
-                </a:solidFill>
-              </a:rPr>
-              <a:t>•  Usa pcapng por defecto (metadatos y comentarios). Convierte a .pcap con editcap solo si una herramienta antigua lo exige.</a:t>
-            </a:r>
-          </a:p>
-          <a:p>
-            <a:pPr>
-              <a:spcAft>
-                <a:spcPts val="600"/>
-              </a:spcAft>
-            </a:pPr>
-            <a:r>
-              <a:rPr sz="1500">
-                <a:solidFill>
-                  <a:srgbClr val="22282E"/>
-                </a:solidFill>
-              </a:rPr>
-              <a:t>•  ❓ ¿Por qué no veo el tráfico de otros equipos en la oficina?</a:t>
+              <a:t>•  A partir de una captura de tu laboratorio con al menos tres protocolos (ICMP, DNS y HTTP), entrega un .pcapng recortado que contenga solo la conversación HTTP completa de una descarga, más una nota…</a:t>
+            </a:r>
+          </a:p>
+          <a:p>
+            <a:pPr>
+              <a:spcAft>
+                <a:spcPts val="600"/>
+              </a:spcAft>
+            </a:pPr>
+            <a:r>
+              <a:rPr sz="1500">
+                <a:solidFill>
+                  <a:srgbClr val="22282E"/>
+                </a:solidFill>
+              </a:rPr>
+              <a:t>•  Criterio de aceptación: al abrir tu archivo, el revisor ve únicamente esa conversación (sin ruido de otros hosts) y tus datos coinciden con lo que muestra la disección.</a:t>
             </a:r>
           </a:p>
         </p:txBody>
@@ -3526,7 +3469,7 @@
                   <a:srgbClr val="0B3D2E"/>
                 </a:solidFill>
               </a:rPr>
-              <a:t>🔗 Referencias</a:t>
+              <a:t>⚠️ Errores comunes</a:t>
             </a:r>
           </a:p>
         </p:txBody>
@@ -3564,6 +3507,334 @@
                   <a:srgbClr val="22282E"/>
                 </a:solidFill>
               </a:rPr>
+              <a:t>•  "No interfaces found" o lista vacía — Faltan permisos de captura; añade el usuario al grupo wireshark o revisa Npcap en Windows</a:t>
+            </a:r>
+          </a:p>
+          <a:p>
+            <a:pPr>
+              <a:spcAft>
+                <a:spcPts val="600"/>
+              </a:spcAft>
+            </a:pPr>
+            <a:r>
+              <a:rPr sz="1500">
+                <a:solidFill>
+                  <a:srgbClr val="22282E"/>
+                </a:solidFill>
+              </a:rPr>
+              <a:t>•  Solo ves tu propio tráfico — Estás en un switch sin SPAN/TAP; captura en el host, usa un TAP o configura mirror port</a:t>
+            </a:r>
+          </a:p>
+          <a:p>
+            <a:pPr>
+              <a:spcAft>
+                <a:spcPts val="600"/>
+              </a:spcAft>
+            </a:pPr>
+            <a:r>
+              <a:rPr sz="1500">
+                <a:solidFill>
+                  <a:srgbClr val="22282E"/>
+                </a:solidFill>
+              </a:rPr>
+              <a:t>•  Todo aparece como "Malformed Packet" — Disector equivocado o offloading del NIC; desactiva TCP checksum offload o usa "Decode As"</a:t>
+            </a:r>
+          </a:p>
+          <a:p>
+            <a:pPr>
+              <a:spcAft>
+                <a:spcPts val="600"/>
+              </a:spcAft>
+            </a:pPr>
+            <a:r>
+              <a:rPr sz="1500">
+                <a:solidFill>
+                  <a:srgbClr val="22282E"/>
+                </a:solidFill>
+              </a:rPr>
+              <a:t>•  Checksums TCP/IP en rojo — Checksum offloading de la tarjeta; desactiva validación en Preferencias del protocolo</a:t>
+            </a:r>
+          </a:p>
+          <a:p>
+            <a:pPr>
+              <a:spcAft>
+                <a:spcPts val="600"/>
+              </a:spcAft>
+            </a:pPr>
+            <a:r>
+              <a:rPr sz="1500">
+                <a:solidFill>
+                  <a:srgbClr val="22282E"/>
+                </a:solidFill>
+              </a:rPr>
+              <a:t>•  Captura enorme e inmanejable — No usaste filtro de captura; aplica BPF o usa un ring buffer con límite de tamaño</a:t>
+            </a:r>
+          </a:p>
+        </p:txBody>
+      </p:sp>
+    </p:spTree>
+  </p:cSld>
+  <p:clrMapOvr>
+    <a:masterClrMapping/>
+  </p:clrMapOvr>
+</p:sld>
+</file>
+
+<file path=ppt/slides/slide13.xml><?xml version="1.0" encoding="utf-8"?>
+<p:sld xmlns:a="http://schemas.openxmlformats.org/drawingml/2006/main" xmlns:p="http://schemas.openxmlformats.org/presentationml/2006/main" xmlns:r="http://schemas.openxmlformats.org/officeDocument/2006/relationships">
+  <p:cSld>
+    <p:spTree>
+      <p:nvGrpSpPr>
+        <p:cNvPr id="1" name=""/>
+        <p:cNvGrpSpPr/>
+        <p:nvPr/>
+      </p:nvGrpSpPr>
+      <p:grpSpPr/>
+      <p:sp>
+        <p:nvSpPr>
+          <p:cNvPr id="2" name="TextBox 1"/>
+          <p:cNvSpPr txBox="1"/>
+          <p:nvPr/>
+        </p:nvSpPr>
+        <p:spPr>
+          <a:xfrm>
+            <a:off x="457200" y="320040"/>
+            <a:ext cx="8229600" cy="822960"/>
+          </a:xfrm>
+          <a:prstGeom prst="rect">
+            <a:avLst/>
+          </a:prstGeom>
+          <a:noFill/>
+        </p:spPr>
+        <p:txBody>
+          <a:bodyPr wrap="square">
+            <a:spAutoFit/>
+          </a:bodyPr>
+          <a:lstStyle/>
+          <a:p>
+            <a:r>
+              <a:rPr sz="2600" b="1">
+                <a:solidFill>
+                  <a:srgbClr val="0B3D2E"/>
+                </a:solidFill>
+              </a:rPr>
+              <a:t>❓ Preguntas frecuentes</a:t>
+            </a:r>
+          </a:p>
+        </p:txBody>
+      </p:sp>
+      <p:sp>
+        <p:nvSpPr>
+          <p:cNvPr id="3" name="TextBox 2"/>
+          <p:cNvSpPr txBox="1"/>
+          <p:nvPr/>
+        </p:nvSpPr>
+        <p:spPr>
+          <a:xfrm>
+            <a:off x="457200" y="1280160"/>
+            <a:ext cx="8229600" cy="4937760"/>
+          </a:xfrm>
+          <a:prstGeom prst="rect">
+            <a:avLst/>
+          </a:prstGeom>
+          <a:noFill/>
+        </p:spPr>
+        <p:txBody>
+          <a:bodyPr wrap="square">
+            <a:spAutoFit/>
+          </a:bodyPr>
+          <a:lstStyle/>
+          <a:p>
+            <a:pPr>
+              <a:spcAft>
+                <a:spcPts val="600"/>
+              </a:spcAft>
+            </a:pPr>
+            <a:r>
+              <a:rPr sz="1500">
+                <a:solidFill>
+                  <a:srgbClr val="22282E"/>
+                </a:solidFill>
+              </a:rPr>
+              <a:t>•  ❓ ¿Cuál es la diferencia entre filtro de captura y filtro de visualización?</a:t>
+            </a:r>
+          </a:p>
+          <a:p>
+            <a:pPr>
+              <a:spcAft>
+                <a:spcPts val="600"/>
+              </a:spcAft>
+            </a:pPr>
+            <a:r>
+              <a:rPr sz="1500">
+                <a:solidFill>
+                  <a:srgbClr val="22282E"/>
+                </a:solidFill>
+              </a:rPr>
+              <a:t>•  El de captura (BPF) decide qué se guarda y no se puede cambiar después; el de visualización solo oculta/enseña sobre lo ya capturado y usa la sintaxis rica de Wireshark (http.request.method == "GET").</a:t>
+            </a:r>
+          </a:p>
+          <a:p>
+            <a:pPr>
+              <a:spcAft>
+                <a:spcPts val="600"/>
+              </a:spcAft>
+            </a:pPr>
+            <a:r>
+              <a:rPr sz="1500">
+                <a:solidFill>
+                  <a:srgbClr val="22282E"/>
+                </a:solidFill>
+              </a:rPr>
+              <a:t>•  ❓ ¿Necesito ser root para capturar?</a:t>
+            </a:r>
+          </a:p>
+          <a:p>
+            <a:pPr>
+              <a:spcAft>
+                <a:spcPts val="600"/>
+              </a:spcAft>
+            </a:pPr>
+            <a:r>
+              <a:rPr sz="1500">
+                <a:solidFill>
+                  <a:srgbClr val="22282E"/>
+                </a:solidFill>
+              </a:rPr>
+              <a:t>•  No es recomendable. Configura dumpcap con capacidades o usa el grupo de captura para que solo el proceso de captura tenga privilegios elevados.</a:t>
+            </a:r>
+          </a:p>
+          <a:p>
+            <a:pPr>
+              <a:spcAft>
+                <a:spcPts val="600"/>
+              </a:spcAft>
+            </a:pPr>
+            <a:r>
+              <a:rPr sz="1500">
+                <a:solidFill>
+                  <a:srgbClr val="22282E"/>
+                </a:solidFill>
+              </a:rPr>
+              <a:t>•  ❓ ¿pcap o pcapng?</a:t>
+            </a:r>
+          </a:p>
+          <a:p>
+            <a:pPr>
+              <a:spcAft>
+                <a:spcPts val="600"/>
+              </a:spcAft>
+            </a:pPr>
+            <a:r>
+              <a:rPr sz="1500">
+                <a:solidFill>
+                  <a:srgbClr val="22282E"/>
+                </a:solidFill>
+              </a:rPr>
+              <a:t>•  Usa pcapng por defecto (metadatos y comentarios). Convierte a .pcap con editcap solo si una herramienta antigua lo exige.</a:t>
+            </a:r>
+          </a:p>
+          <a:p>
+            <a:pPr>
+              <a:spcAft>
+                <a:spcPts val="600"/>
+              </a:spcAft>
+            </a:pPr>
+            <a:r>
+              <a:rPr sz="1500">
+                <a:solidFill>
+                  <a:srgbClr val="22282E"/>
+                </a:solidFill>
+              </a:rPr>
+              <a:t>•  ❓ ¿Por qué no veo el tráfico de otros equipos en la oficina?</a:t>
+            </a:r>
+          </a:p>
+        </p:txBody>
+      </p:sp>
+    </p:spTree>
+  </p:cSld>
+  <p:clrMapOvr>
+    <a:masterClrMapping/>
+  </p:clrMapOvr>
+</p:sld>
+</file>
+
+<file path=ppt/slides/slide14.xml><?xml version="1.0" encoding="utf-8"?>
+<p:sld xmlns:a="http://schemas.openxmlformats.org/drawingml/2006/main" xmlns:p="http://schemas.openxmlformats.org/presentationml/2006/main" xmlns:r="http://schemas.openxmlformats.org/officeDocument/2006/relationships">
+  <p:cSld>
+    <p:spTree>
+      <p:nvGrpSpPr>
+        <p:cNvPr id="1" name=""/>
+        <p:cNvGrpSpPr/>
+        <p:nvPr/>
+      </p:nvGrpSpPr>
+      <p:grpSpPr/>
+      <p:sp>
+        <p:nvSpPr>
+          <p:cNvPr id="2" name="TextBox 1"/>
+          <p:cNvSpPr txBox="1"/>
+          <p:nvPr/>
+        </p:nvSpPr>
+        <p:spPr>
+          <a:xfrm>
+            <a:off x="457200" y="320040"/>
+            <a:ext cx="8229600" cy="822960"/>
+          </a:xfrm>
+          <a:prstGeom prst="rect">
+            <a:avLst/>
+          </a:prstGeom>
+          <a:noFill/>
+        </p:spPr>
+        <p:txBody>
+          <a:bodyPr wrap="square">
+            <a:spAutoFit/>
+          </a:bodyPr>
+          <a:lstStyle/>
+          <a:p>
+            <a:r>
+              <a:rPr sz="2600" b="1">
+                <a:solidFill>
+                  <a:srgbClr val="0B3D2E"/>
+                </a:solidFill>
+              </a:rPr>
+              <a:t>🔗 Referencias</a:t>
+            </a:r>
+          </a:p>
+        </p:txBody>
+      </p:sp>
+      <p:sp>
+        <p:nvSpPr>
+          <p:cNvPr id="3" name="TextBox 2"/>
+          <p:cNvSpPr txBox="1"/>
+          <p:nvPr/>
+        </p:nvSpPr>
+        <p:spPr>
+          <a:xfrm>
+            <a:off x="457200" y="1280160"/>
+            <a:ext cx="8229600" cy="4937760"/>
+          </a:xfrm>
+          <a:prstGeom prst="rect">
+            <a:avLst/>
+          </a:prstGeom>
+          <a:noFill/>
+        </p:spPr>
+        <p:txBody>
+          <a:bodyPr wrap="square">
+            <a:spAutoFit/>
+          </a:bodyPr>
+          <a:lstStyle/>
+          <a:p>
+            <a:pPr>
+              <a:spcAft>
+                <a:spcPts val="600"/>
+              </a:spcAft>
+            </a:pPr>
+            <a:r>
+              <a:rPr sz="1500">
+                <a:solidFill>
+                  <a:srgbClr val="22282E"/>
+                </a:solidFill>
+              </a:rPr>
               <a:t>•  Sanders, C. Practical Packet Analysis, 3rd ed. No Starch Press. &lt;https://nostarch.com/packetanalysis3&gt;</a:t>
             </a:r>
           </a:p>
@@ -3614,6 +3885,81 @@
           </a:p>
         </p:txBody>
       </p:sp>
+    </p:spTree>
+  </p:cSld>
+  <p:clrMapOvr>
+    <a:masterClrMapping/>
+  </p:clrMapOvr>
+</p:sld>
+</file>
+
+<file path=ppt/slides/slide15.xml><?xml version="1.0" encoding="utf-8"?>
+<p:sld xmlns:a="http://schemas.openxmlformats.org/drawingml/2006/main" xmlns:p="http://schemas.openxmlformats.org/presentationml/2006/main" xmlns:r="http://schemas.openxmlformats.org/officeDocument/2006/relationships">
+  <p:cSld>
+    <p:spTree>
+      <p:nvGrpSpPr>
+        <p:cNvPr id="1" name=""/>
+        <p:cNvGrpSpPr/>
+        <p:nvPr/>
+      </p:nvGrpSpPr>
+      <p:grpSpPr/>
+      <p:sp>
+        <p:nvSpPr>
+          <p:cNvPr id="2" name="TextBox 1"/>
+          <p:cNvSpPr txBox="1"/>
+          <p:nvPr/>
+        </p:nvSpPr>
+        <p:spPr>
+          <a:xfrm>
+            <a:off x="457200" y="274320"/>
+            <a:ext cx="8229600" cy="640080"/>
+          </a:xfrm>
+          <a:prstGeom prst="rect">
+            <a:avLst/>
+          </a:prstGeom>
+          <a:noFill/>
+        </p:spPr>
+        <p:txBody>
+          <a:bodyPr wrap="square">
+            <a:spAutoFit/>
+          </a:bodyPr>
+          <a:lstStyle/>
+          <a:p>
+            <a:r>
+              <a:rPr sz="2200" b="1">
+                <a:solidFill>
+                  <a:srgbClr val="0B3D2E"/>
+                </a:solidFill>
+              </a:rPr>
+              <a:t>Diagrama de la clase</a:t>
+            </a:r>
+          </a:p>
+        </p:txBody>
+      </p:sp>
+      <p:pic>
+        <p:nvPicPr>
+          <p:cNvPr id="3" name="Picture 2" descr="743875bbcd0b7d06.png"/>
+          <p:cNvPicPr>
+            <a:picLocks noChangeAspect="1"/>
+          </p:cNvPicPr>
+          <p:nvPr/>
+        </p:nvPicPr>
+        <p:blipFill>
+          <a:blip r:embed="rId2"/>
+          <a:stretch>
+            <a:fillRect/>
+          </a:stretch>
+        </p:blipFill>
+        <p:spPr>
+          <a:xfrm>
+            <a:off x="457200" y="2308860"/>
+            <a:ext cx="8229600" cy="2880360"/>
+          </a:xfrm>
+          <a:prstGeom prst="rect">
+            <a:avLst/>
+          </a:prstGeom>
+        </p:spPr>
+      </p:pic>
     </p:spTree>
   </p:cSld>
   <p:clrMapOvr>
@@ -3698,7 +4044,7 @@
                   <a:srgbClr val="22282E"/>
                 </a:solidFill>
               </a:rPr>
-              <a:t>•  Aprender a capturar tráfico de red con Wireshark, entender la anatomía de un paquete disecado capa por capa (Ethernet → IP → TCP/UDP → aplicación) y usar la interfaz para responder preguntas concretas: quién habla con quién, con qué protocolo y qué transporta. Al final el alumno tendrá un método reproducible para pasar de una captura cruda a una conclusión.</a:t>
+              <a:t>•  Aprender a capturar tráfico de red con Wireshark, entender la anatomía de un paquete disecado capa por capa (Ethernet → IP → TCP/UDP → aplicación) y usar la interfaz para responder preguntas…</a:t>
             </a:r>
           </a:p>
         </p:txBody>
@@ -4107,7 +4453,7 @@
                   <a:srgbClr val="0B3D2E"/>
                 </a:solidFill>
               </a:rPr>
-              <a:t>📖 Definiciones y características</a:t>
+              <a:t>🧠 Explicación en profundidad</a:t>
             </a:r>
           </a:p>
         </p:txBody>
@@ -4145,82 +4491,97 @@
                   <a:srgbClr val="22282E"/>
                 </a:solidFill>
               </a:rPr>
-              <a:t>•  Paquete / trama (frame): unidad de datos capturada en el cable. Wireshark muestra la trama Ethernet completa; su característica clave es que incluye todas las cabeceras encapsuladas.</a:t>
-            </a:r>
-          </a:p>
-          <a:p>
-            <a:pPr>
-              <a:spcAft>
-                <a:spcPts val="600"/>
-              </a:spcAft>
-            </a:pPr>
-            <a:r>
-              <a:rPr sz="1500">
-                <a:solidFill>
-                  <a:srgbClr val="22282E"/>
-                </a:solidFill>
-              </a:rPr>
-              <a:t>•  Modo promiscuo: el NIC entrega a la pila todos los frames que ve, no solo los dirigidos a su MAC. Sin él, en una red conmutada solo verás broadcast, multicast y tu propio unicast.</a:t>
-            </a:r>
-          </a:p>
-          <a:p>
-            <a:pPr>
-              <a:spcAft>
-                <a:spcPts val="600"/>
-              </a:spcAft>
-            </a:pPr>
-            <a:r>
-              <a:rPr sz="1500">
-                <a:solidFill>
-                  <a:srgbClr val="22282E"/>
-                </a:solidFill>
-              </a:rPr>
-              <a:t>•  pcapng: formato de captura moderno que guarda metadatos (interfaz, comentarios, timestamps de alta resolución). Sucesor del clásico .pcap.</a:t>
-            </a:r>
-          </a:p>
-          <a:p>
-            <a:pPr>
-              <a:spcAft>
-                <a:spcPts val="600"/>
-              </a:spcAft>
-            </a:pPr>
-            <a:r>
-              <a:rPr sz="1500">
-                <a:solidFill>
-                  <a:srgbClr val="22282E"/>
-                </a:solidFill>
-              </a:rPr>
-              <a:t>•  Disector (dissector): módulo que interpreta bytes de un protocolo y los presenta como campos legibles. Wireshark trae cientos.</a:t>
-            </a:r>
-          </a:p>
-          <a:p>
-            <a:pPr>
-              <a:spcAft>
-                <a:spcPts val="600"/>
-              </a:spcAft>
-            </a:pPr>
-            <a:r>
-              <a:rPr sz="1500">
-                <a:solidFill>
-                  <a:srgbClr val="22282E"/>
-                </a:solidFill>
-              </a:rPr>
-              <a:t>•  Colorización: reglas que pintan filas según condiciones (p. ej. rojo para checksums malos, negro para resets TCP).</a:t>
-            </a:r>
-          </a:p>
-          <a:p>
-            <a:pPr>
-              <a:spcAft>
-                <a:spcPts val="600"/>
-              </a:spcAft>
-            </a:pPr>
-            <a:r>
-              <a:rPr sz="1500">
-                <a:solidFill>
-                  <a:srgbClr val="22282E"/>
-                </a:solidFill>
-              </a:rPr>
-              <a:t>•  SPAN/mirror port: puerto del switch configurado para copiar el tráfico de otros puertos hacia el analizador.</a:t>
+              <a:t>•  La primera decisión de cualquier análisis no es qué filtro escribir, sino dónde</a:t>
+            </a:r>
+          </a:p>
+          <a:p>
+            <a:pPr>
+              <a:spcAft>
+                <a:spcPts val="600"/>
+              </a:spcAft>
+            </a:pPr>
+            <a:r>
+              <a:rPr sz="1500">
+                <a:solidFill>
+                  <a:srgbClr val="22282E"/>
+                </a:solidFill>
+              </a:rPr>
+              <a:t>•  enchufar el analizador, y es la que más capturas inútiles produce. La red de los años</a:t>
+            </a:r>
+          </a:p>
+          <a:p>
+            <a:pPr>
+              <a:spcAft>
+                <a:spcPts val="600"/>
+              </a:spcAft>
+            </a:pPr>
+            <a:r>
+              <a:rPr sz="1500">
+                <a:solidFill>
+                  <a:srgbClr val="22282E"/>
+                </a:solidFill>
+              </a:rPr>
+              <a:t>•  noventa usaba hubs, que repetían cada trama por todos los puertos: bastaba con</a:t>
+            </a:r>
+          </a:p>
+          <a:p>
+            <a:pPr>
+              <a:spcAft>
+                <a:spcPts val="600"/>
+              </a:spcAft>
+            </a:pPr>
+            <a:r>
+              <a:rPr sz="1500">
+                <a:solidFill>
+                  <a:srgbClr val="22282E"/>
+                </a:solidFill>
+              </a:rPr>
+              <a:t>•  conectarse en cualquier sitio para verlo todo. La red moderna es conmutada, y un</a:t>
+            </a:r>
+          </a:p>
+          <a:p>
+            <a:pPr>
+              <a:spcAft>
+                <a:spcPts val="600"/>
+              </a:spcAft>
+            </a:pPr>
+            <a:r>
+              <a:rPr sz="1500">
+                <a:solidFill>
+                  <a:srgbClr val="22282E"/>
+                </a:solidFill>
+              </a:rPr>
+              <a:t>•  switch aprende qué MAC vive detrás de cada puerto y entrega cada trama solo por el</a:t>
+            </a:r>
+          </a:p>
+          <a:p>
+            <a:pPr>
+              <a:spcAft>
+                <a:spcPts val="600"/>
+              </a:spcAft>
+            </a:pPr>
+            <a:r>
+              <a:rPr sz="1500">
+                <a:solidFill>
+                  <a:srgbClr val="22282E"/>
+                </a:solidFill>
+              </a:rPr>
+              <a:t>•  puerto correcto. La consecuencia práctica es dura: si abres Wireshark en tu portátil</a:t>
+            </a:r>
+          </a:p>
+          <a:p>
+            <a:pPr>
+              <a:spcAft>
+                <a:spcPts val="600"/>
+              </a:spcAft>
+            </a:pPr>
+            <a:r>
+              <a:rPr sz="1500">
+                <a:solidFill>
+                  <a:srgbClr val="22282E"/>
+                </a:solidFill>
+              </a:rPr>
+              <a:t>•  conectado a un switch, verás tu propio tráfico, el broadcast y el multicast, y</a:t>
             </a:r>
           </a:p>
         </p:txBody>
@@ -4271,7 +4632,7 @@
                   <a:srgbClr val="0B3D2E"/>
                 </a:solidFill>
               </a:rPr>
-              <a:t>🧰 Herramientas y preparación</a:t>
+              <a:t>📖 Definiciones y características</a:t>
             </a:r>
           </a:p>
         </p:txBody>
@@ -4309,82 +4670,82 @@
                   <a:srgbClr val="22282E"/>
                 </a:solidFill>
               </a:rPr>
-              <a:t>•  Wireshark 4.x (incluye dumpcap, tshark, editcap, mergecap). Instalación:</a:t>
-            </a:r>
-          </a:p>
-          <a:p>
-            <a:pPr>
-              <a:spcAft>
-                <a:spcPts val="600"/>
-              </a:spcAft>
-            </a:pPr>
-            <a:r>
-              <a:rPr sz="1500">
-                <a:solidFill>
-                  <a:srgbClr val="22282E"/>
-                </a:solidFill>
-              </a:rPr>
-              <a:t>•  Debian/Ubuntu: sudo apt install wireshark (acepta que usuarios del grupo wireshark capturen sin root).</a:t>
-            </a:r>
-          </a:p>
-          <a:p>
-            <a:pPr>
-              <a:spcAft>
-                <a:spcPts val="600"/>
-              </a:spcAft>
-            </a:pPr>
-            <a:r>
-              <a:rPr sz="1500">
-                <a:solidFill>
-                  <a:srgbClr val="22282E"/>
-                </a:solidFill>
-              </a:rPr>
-              <a:t>•  macOS: brew install --cask wireshark. Windows: instalador oficial + Npcap.</a:t>
-            </a:r>
-          </a:p>
-          <a:p>
-            <a:pPr>
-              <a:spcAft>
-                <a:spcPts val="600"/>
-              </a:spcAft>
-            </a:pPr>
-            <a:r>
-              <a:rPr sz="1500">
-                <a:solidFill>
-                  <a:srgbClr val="22282E"/>
-                </a:solidFill>
-              </a:rPr>
-              <a:t>•  Añadir tu usuario al grupo de captura para no ejecutar como root:</a:t>
-            </a:r>
-          </a:p>
-          <a:p>
-            <a:pPr>
-              <a:spcAft>
-                <a:spcPts val="600"/>
-              </a:spcAft>
-            </a:pPr>
-            <a:r>
-              <a:rPr sz="1500">
-                <a:solidFill>
-                  <a:srgbClr val="22282E"/>
-                </a:solidFill>
-              </a:rPr>
-              <a:t>•  sudo usermod -aG wireshark $USER   # cerrar sesión y volver a entrar</a:t>
-            </a:r>
-          </a:p>
-          <a:p>
-            <a:pPr>
-              <a:spcAft>
-                <a:spcPts val="600"/>
-              </a:spcAft>
-            </a:pPr>
-            <a:r>
-              <a:rPr sz="1500">
-                <a:solidFill>
-                  <a:srgbClr val="22282E"/>
-                </a:solidFill>
-              </a:rPr>
-              <a:t>•  Capturas de práctica: usa las muestras oficiales de &lt;https://wiki.wireshark.org/SampleCaptures&gt; o genera tráfico propio en tu laboratorio.</a:t>
+              <a:t>•  Paquete / trama (frame): unidad de datos capturada en el cable. Wireshark muestra la trama Ethernet completa; su característica clave es que incluye todas las cabeceras encapsuladas.</a:t>
+            </a:r>
+          </a:p>
+          <a:p>
+            <a:pPr>
+              <a:spcAft>
+                <a:spcPts val="600"/>
+              </a:spcAft>
+            </a:pPr>
+            <a:r>
+              <a:rPr sz="1500">
+                <a:solidFill>
+                  <a:srgbClr val="22282E"/>
+                </a:solidFill>
+              </a:rPr>
+              <a:t>•  Modo promiscuo: el NIC entrega a la pila todos los frames que ve, no solo los dirigidos a su MAC. Sin él, en una red conmutada solo verás broadcast, multicast y tu propio unicast.</a:t>
+            </a:r>
+          </a:p>
+          <a:p>
+            <a:pPr>
+              <a:spcAft>
+                <a:spcPts val="600"/>
+              </a:spcAft>
+            </a:pPr>
+            <a:r>
+              <a:rPr sz="1500">
+                <a:solidFill>
+                  <a:srgbClr val="22282E"/>
+                </a:solidFill>
+              </a:rPr>
+              <a:t>•  pcapng: formato de captura moderno que guarda metadatos (interfaz, comentarios, timestamps de alta resolución). Sucesor del clásico .pcap.</a:t>
+            </a:r>
+          </a:p>
+          <a:p>
+            <a:pPr>
+              <a:spcAft>
+                <a:spcPts val="600"/>
+              </a:spcAft>
+            </a:pPr>
+            <a:r>
+              <a:rPr sz="1500">
+                <a:solidFill>
+                  <a:srgbClr val="22282E"/>
+                </a:solidFill>
+              </a:rPr>
+              <a:t>•  Disector (dissector): módulo que interpreta bytes de un protocolo y los presenta como campos legibles. Wireshark trae cientos.</a:t>
+            </a:r>
+          </a:p>
+          <a:p>
+            <a:pPr>
+              <a:spcAft>
+                <a:spcPts val="600"/>
+              </a:spcAft>
+            </a:pPr>
+            <a:r>
+              <a:rPr sz="1500">
+                <a:solidFill>
+                  <a:srgbClr val="22282E"/>
+                </a:solidFill>
+              </a:rPr>
+              <a:t>•  Colorización: reglas que pintan filas según condiciones (p. ej. rojo para checksums malos, negro para resets TCP).</a:t>
+            </a:r>
+          </a:p>
+          <a:p>
+            <a:pPr>
+              <a:spcAft>
+                <a:spcPts val="600"/>
+              </a:spcAft>
+            </a:pPr>
+            <a:r>
+              <a:rPr sz="1500">
+                <a:solidFill>
+                  <a:srgbClr val="22282E"/>
+                </a:solidFill>
+              </a:rPr>
+              <a:t>•  SPAN/mirror port: puerto del switch configurado para copiar el tráfico de otros puertos hacia el analizador.</a:t>
             </a:r>
           </a:p>
         </p:txBody>
@@ -4435,7 +4796,7 @@
                   <a:srgbClr val="0B3D2E"/>
                 </a:solidFill>
               </a:rPr>
-              <a:t>🧪 Laboratorio guiado</a:t>
+              <a:t>📔 Glosario</a:t>
             </a:r>
           </a:p>
         </p:txBody>
@@ -4473,97 +4834,97 @@
                   <a:srgbClr val="22282E"/>
                 </a:solidFill>
               </a:rPr>
-              <a:t>•  Elige interfaz. Abre Wireshark; en la pantalla de inicio verás las interfaces con un sparkline de actividad. Elige la que tenga tráfico (p. ej. eth0).</a:t>
-            </a:r>
-          </a:p>
-          <a:p>
-            <a:pPr>
-              <a:spcAft>
-                <a:spcPts val="600"/>
-              </a:spcAft>
-            </a:pPr>
-            <a:r>
-              <a:rPr sz="1500">
-                <a:solidFill>
-                  <a:srgbClr val="22282E"/>
-                </a:solidFill>
-              </a:rPr>
-              <a:t>•  Aplica un filtro de captura para reducir ruido antes de capturar. En el campo "capture filter" escribe:</a:t>
-            </a:r>
-          </a:p>
-          <a:p>
-            <a:pPr>
-              <a:spcAft>
-                <a:spcPts val="600"/>
-              </a:spcAft>
-            </a:pPr>
-            <a:r>
-              <a:rPr sz="1500">
-                <a:solidFill>
-                  <a:srgbClr val="22282E"/>
-                </a:solidFill>
-              </a:rPr>
-              <a:t>•  host 192.168.56.101 and tcp port 80</a:t>
-            </a:r>
-          </a:p>
-          <a:p>
-            <a:pPr>
-              <a:spcAft>
-                <a:spcPts val="600"/>
-              </a:spcAft>
-            </a:pPr>
-            <a:r>
-              <a:rPr sz="1500">
-                <a:solidFill>
-                  <a:srgbClr val="22282E"/>
-                </a:solidFill>
-              </a:rPr>
-              <a:t>•  (sintaxis BPF, distinta a los filtros de visualización).</a:t>
-            </a:r>
-          </a:p>
-          <a:p>
-            <a:pPr>
-              <a:spcAft>
-                <a:spcPts val="600"/>
-              </a:spcAft>
-            </a:pPr>
-            <a:r>
-              <a:rPr sz="1500">
-                <a:solidFill>
-                  <a:srgbClr val="22282E"/>
-                </a:solidFill>
-              </a:rPr>
-              <a:t>•  Inicia la captura con la aleta azul. En otra terminal genera tráfico:</a:t>
-            </a:r>
-          </a:p>
-          <a:p>
-            <a:pPr>
-              <a:spcAft>
-                <a:spcPts val="600"/>
-              </a:spcAft>
-            </a:pPr>
-            <a:r>
-              <a:rPr sz="1500">
-                <a:solidFill>
-                  <a:srgbClr val="22282E"/>
-                </a:solidFill>
-              </a:rPr>
-              <a:t>•  curl http://192.168.56.101/</a:t>
-            </a:r>
-          </a:p>
-          <a:p>
-            <a:pPr>
-              <a:spcAft>
-                <a:spcPts val="600"/>
-              </a:spcAft>
-            </a:pPr>
-            <a:r>
-              <a:rPr sz="1500">
-                <a:solidFill>
-                  <a:srgbClr val="22282E"/>
-                </a:solidFill>
-              </a:rPr>
-              <a:t>•  Detén la captura (botón rojo). Observa las tres zonas: lista, detalle y bytes.</a:t>
+              <a:t>•  Término — Definición concisa</a:t>
+            </a:r>
+          </a:p>
+          <a:p>
+            <a:pPr>
+              <a:spcAft>
+                <a:spcPts val="600"/>
+              </a:spcAft>
+            </a:pPr>
+            <a:r>
+              <a:rPr sz="1500">
+                <a:solidFill>
+                  <a:srgbClr val="22282E"/>
+                </a:solidFill>
+              </a:rPr>
+              <a:t>•  Trama (frame) — Unidad de datos en el cable, con todas las cabeceras encapsuladas</a:t>
+            </a:r>
+          </a:p>
+          <a:p>
+            <a:pPr>
+              <a:spcAft>
+                <a:spcPts val="600"/>
+              </a:spcAft>
+            </a:pPr>
+            <a:r>
+              <a:rPr sz="1500">
+                <a:solidFill>
+                  <a:srgbClr val="22282E"/>
+                </a:solidFill>
+              </a:rPr>
+              <a:t>•  Modo promiscuo — La NIC entrega todas las tramas Ethernet que ve, no solo las suyas</a:t>
+            </a:r>
+          </a:p>
+          <a:p>
+            <a:pPr>
+              <a:spcAft>
+                <a:spcPts val="600"/>
+              </a:spcAft>
+            </a:pPr>
+            <a:r>
+              <a:rPr sz="1500">
+                <a:solidFill>
+                  <a:srgbClr val="22282E"/>
+                </a:solidFill>
+              </a:rPr>
+              <a:t>•  Modo monitor — Captura de tramas 802.11 crudas sin asociarse a una red</a:t>
+            </a:r>
+          </a:p>
+          <a:p>
+            <a:pPr>
+              <a:spcAft>
+                <a:spcPts val="600"/>
+              </a:spcAft>
+            </a:pPr>
+            <a:r>
+              <a:rPr sz="1500">
+                <a:solidFill>
+                  <a:srgbClr val="22282E"/>
+                </a:solidFill>
+              </a:rPr>
+              <a:t>•  SPAN / mirror port — Puerto del switch que copia el tráfico de otros puertos</a:t>
+            </a:r>
+          </a:p>
+          <a:p>
+            <a:pPr>
+              <a:spcAft>
+                <a:spcPts val="600"/>
+              </a:spcAft>
+            </a:pPr>
+            <a:r>
+              <a:rPr sz="1500">
+                <a:solidFill>
+                  <a:srgbClr val="22282E"/>
+                </a:solidFill>
+              </a:rPr>
+              <a:t>•  TAP — Dispositivo pasivo que duplica el tráfico de un enlace sin participar en él</a:t>
+            </a:r>
+          </a:p>
+          <a:p>
+            <a:pPr>
+              <a:spcAft>
+                <a:spcPts val="600"/>
+              </a:spcAft>
+            </a:pPr>
+            <a:r>
+              <a:rPr sz="1500">
+                <a:solidFill>
+                  <a:srgbClr val="22282E"/>
+                </a:solidFill>
+              </a:rPr>
+              <a:t>•  BPF — Berkeley Packet Filter: sintaxis del filtro de captura</a:t>
             </a:r>
           </a:p>
         </p:txBody>
@@ -4614,7 +4975,7 @@
                   <a:srgbClr val="0B3D2E"/>
                 </a:solidFill>
               </a:rPr>
-              <a:t>✍️ Ejercicios</a:t>
+              <a:t>🧰 Herramientas y preparación</a:t>
             </a:r>
           </a:p>
         </p:txBody>
@@ -4652,82 +5013,67 @@
                   <a:srgbClr val="22282E"/>
                 </a:solidFill>
               </a:rPr>
-              <a:t>•  Captura un ping a un host de tu laboratorio e identifica los paquetes ICMP echo request/reply.</a:t>
-            </a:r>
-          </a:p>
-          <a:p>
-            <a:pPr>
-              <a:spcAft>
-                <a:spcPts val="600"/>
-              </a:spcAft>
-            </a:pPr>
-            <a:r>
-              <a:rPr sz="1500">
-                <a:solidFill>
-                  <a:srgbClr val="22282E"/>
-                </a:solidFill>
-              </a:rPr>
-              <a:t>•  Con una captura HTTP, localiza el User-Agent enviado por el cliente.</a:t>
-            </a:r>
-          </a:p>
-          <a:p>
-            <a:pPr>
-              <a:spcAft>
-                <a:spcPts val="600"/>
-              </a:spcAft>
-            </a:pPr>
-            <a:r>
-              <a:rPr sz="1500">
-                <a:solidFill>
-                  <a:srgbClr val="22282E"/>
-                </a:solidFill>
-              </a:rPr>
-              <a:t>•  Añade columnas para ip.ttl y compara TTL de tu gateway vs. un host remoto; deduce el SO probable.</a:t>
-            </a:r>
-          </a:p>
-          <a:p>
-            <a:pPr>
-              <a:spcAft>
-                <a:spcPts val="600"/>
-              </a:spcAft>
-            </a:pPr>
-            <a:r>
-              <a:rPr sz="1500">
-                <a:solidFill>
-                  <a:srgbClr val="22282E"/>
-                </a:solidFill>
-              </a:rPr>
-              <a:t>•  Crea un perfil nuevo llamado "triage" con tus columnas y colores, y cámbialo con el selector inferior derecho.</a:t>
-            </a:r>
-          </a:p>
-          <a:p>
-            <a:pPr>
-              <a:spcAft>
-                <a:spcPts val="600"/>
-              </a:spcAft>
-            </a:pPr>
-            <a:r>
-              <a:rPr sz="1500">
-                <a:solidFill>
-                  <a:srgbClr val="22282E"/>
-                </a:solidFill>
-              </a:rPr>
-              <a:t>•  Usa Estadísticas → Jerarquía de protocolos para ver la composición de una captura de 5 minutos.</a:t>
-            </a:r>
-          </a:p>
-          <a:p>
-            <a:pPr>
-              <a:spcAft>
-                <a:spcPts val="600"/>
-              </a:spcAft>
-            </a:pPr>
-            <a:r>
-              <a:rPr sz="1500">
-                <a:solidFill>
-                  <a:srgbClr val="22282E"/>
-                </a:solidFill>
-              </a:rPr>
-              <a:t>•  Exporta a texto plano (Archivo → Exportar disecciones de paquetes) solo los paquetes de un flujo.</a:t>
+              <a:t>•  Wireshark 4.x (incluye dumpcap, tshark, editcap, mergecap). Instalación:</a:t>
+            </a:r>
+          </a:p>
+          <a:p>
+            <a:pPr>
+              <a:spcAft>
+                <a:spcPts val="600"/>
+              </a:spcAft>
+            </a:pPr>
+            <a:r>
+              <a:rPr sz="1500">
+                <a:solidFill>
+                  <a:srgbClr val="22282E"/>
+                </a:solidFill>
+              </a:rPr>
+              <a:t>•  Debian/Ubuntu: sudo apt install wireshark (acepta que usuarios del grupo wireshark capturen sin root).</a:t>
+            </a:r>
+          </a:p>
+          <a:p>
+            <a:pPr>
+              <a:spcAft>
+                <a:spcPts val="600"/>
+              </a:spcAft>
+            </a:pPr>
+            <a:r>
+              <a:rPr sz="1500">
+                <a:solidFill>
+                  <a:srgbClr val="22282E"/>
+                </a:solidFill>
+              </a:rPr>
+              <a:t>•  macOS: brew install --cask wireshark. Windows: instalador oficial + Npcap.</a:t>
+            </a:r>
+          </a:p>
+          <a:p>
+            <a:pPr>
+              <a:spcAft>
+                <a:spcPts val="600"/>
+              </a:spcAft>
+            </a:pPr>
+            <a:r>
+              <a:rPr sz="1500">
+                <a:solidFill>
+                  <a:srgbClr val="22282E"/>
+                </a:solidFill>
+              </a:rPr>
+              <a:t>•  Añadir tu usuario al grupo de captura para no ejecutar como root:</a:t>
+            </a:r>
+          </a:p>
+          <a:p>
+            <a:pPr>
+              <a:spcAft>
+                <a:spcPts val="600"/>
+              </a:spcAft>
+            </a:pPr>
+            <a:r>
+              <a:rPr sz="1500">
+                <a:solidFill>
+                  <a:srgbClr val="22282E"/>
+                </a:solidFill>
+              </a:rPr>
+              <a:t>•  Capturas de práctica: usa las muestras oficiales de &lt;https://wiki.wireshark.org/SampleCaptures&gt; o genera tráfico propio en tu laboratorio.</a:t>
             </a:r>
           </a:p>
         </p:txBody>
@@ -4778,7 +5124,7 @@
                   <a:srgbClr val="0B3D2E"/>
                 </a:solidFill>
               </a:rPr>
-              <a:t>📝 Reto verificable</a:t>
+              <a:t>🧪 Laboratorio guiado</a:t>
             </a:r>
           </a:p>
         </p:txBody>
@@ -4816,22 +5162,97 @@
                   <a:srgbClr val="22282E"/>
                 </a:solidFill>
               </a:rPr>
-              <a:t>•  A partir de una captura de tu laboratorio con al menos tres protocolos (ICMP, DNS y HTTP), entrega un .pcapng recortado que contenga solo la conversación HTTP completa de una descarga, más una nota con: IP cliente, IP servidor, recurso solicitado y código de respuesta.</a:t>
-            </a:r>
-          </a:p>
-          <a:p>
-            <a:pPr>
-              <a:spcAft>
-                <a:spcPts val="600"/>
-              </a:spcAft>
-            </a:pPr>
-            <a:r>
-              <a:rPr sz="1500">
-                <a:solidFill>
-                  <a:srgbClr val="22282E"/>
-                </a:solidFill>
-              </a:rPr>
-              <a:t>•  Criterio de aceptación: al abrir tu archivo, el revisor ve únicamente esa conversación (sin ruido de otros hosts) y tus datos coinciden con lo que muestra la disección.</a:t>
+              <a:t>•  Elige interfaz. Abre Wireshark; en la pantalla de inicio verás las interfaces con un sparkline de actividad. Elige la que tenga tráfico (p. ej. eth0).</a:t>
+            </a:r>
+          </a:p>
+          <a:p>
+            <a:pPr>
+              <a:spcAft>
+                <a:spcPts val="600"/>
+              </a:spcAft>
+            </a:pPr>
+            <a:r>
+              <a:rPr sz="1500">
+                <a:solidFill>
+                  <a:srgbClr val="22282E"/>
+                </a:solidFill>
+              </a:rPr>
+              <a:t>•  Aplica un filtro de captura para reducir ruido antes de capturar. En el campo "capture filter" escribe:</a:t>
+            </a:r>
+          </a:p>
+          <a:p>
+            <a:pPr>
+              <a:spcAft>
+                <a:spcPts val="600"/>
+              </a:spcAft>
+            </a:pPr>
+            <a:r>
+              <a:rPr sz="1500">
+                <a:solidFill>
+                  <a:srgbClr val="22282E"/>
+                </a:solidFill>
+              </a:rPr>
+              <a:t>•  (sintaxis BPF, distinta a los filtros de visualización).</a:t>
+            </a:r>
+          </a:p>
+          <a:p>
+            <a:pPr>
+              <a:spcAft>
+                <a:spcPts val="600"/>
+              </a:spcAft>
+            </a:pPr>
+            <a:r>
+              <a:rPr sz="1500">
+                <a:solidFill>
+                  <a:srgbClr val="22282E"/>
+                </a:solidFill>
+              </a:rPr>
+              <a:t>•  Inicia la captura con la aleta azul. En otra terminal genera tráfico:</a:t>
+            </a:r>
+          </a:p>
+          <a:p>
+            <a:pPr>
+              <a:spcAft>
+                <a:spcPts val="600"/>
+              </a:spcAft>
+            </a:pPr>
+            <a:r>
+              <a:rPr sz="1500">
+                <a:solidFill>
+                  <a:srgbClr val="22282E"/>
+                </a:solidFill>
+              </a:rPr>
+              <a:t>•  Detén la captura (botón rojo). Observa las tres zonas: lista, detalle y bytes.</a:t>
+            </a:r>
+          </a:p>
+          <a:p>
+            <a:pPr>
+              <a:spcAft>
+                <a:spcPts val="600"/>
+              </a:spcAft>
+            </a:pPr>
+            <a:r>
+              <a:rPr sz="1500">
+                <a:solidFill>
+                  <a:srgbClr val="22282E"/>
+                </a:solidFill>
+              </a:rPr>
+              <a:t>•  Expande la disección de un paquete HTTP: haz clic en el triángulo de cada capa (Ethernet II → Internet Protocol → Transmission Control Protocol → Hypertext Transfer Protocol).</a:t>
+            </a:r>
+          </a:p>
+          <a:p>
+            <a:pPr>
+              <a:spcAft>
+                <a:spcPts val="600"/>
+              </a:spcAft>
+            </a:pPr>
+            <a:r>
+              <a:rPr sz="1500">
+                <a:solidFill>
+                  <a:srgbClr val="22282E"/>
+                </a:solidFill>
+              </a:rPr>
+              <a:t>•  Identifica el 3-way handshake: localiza SYN, SYN, ACK, ACK al inicio del flujo.</a:t>
             </a:r>
           </a:p>
         </p:txBody>
